--- a/fixtures/sample-editor-space.pptx
+++ b/fixtures/sample-editor-space.pptx
@@ -156,6 +156,32 @@
           </a:prstGeom>
           <a:solidFill>
             <a:schemeClr val="accent3"/>
+          </a:solidFill>
+        </p:spPr>
+        <p:txBody>
+          <a:bodyPr anchor="ctr"/>
+          <a:lstStyle/>
+          <a:p>
+            <a:endParaRPr/>
+          </a:p>
+        </p:txBody>
+      </p:sp>
+      <p:sp>
+        <p:nvSpPr>
+          <p:cNvPr id="103" name="space-rotated-45"/>
+          <p:cNvSpPr/>
+          <p:nvPr/>
+        </p:nvSpPr>
+        <p:spPr>
+          <a:xfrm rot="2700000">
+            <a:off x="762000" y="3905250"/>
+            <a:ext cx="1905000" cy="1333500"/>
+          </a:xfrm>
+          <a:prstGeom prst="rect">
+            <a:avLst/>
+          </a:prstGeom>
+          <a:solidFill>
+            <a:schemeClr val="accent4"/>
           </a:solidFill>
         </p:spPr>
         <p:txBody>
@@ -196,7 +222,7 @@
           </p:grpSpPr>
           <p:sp>
             <p:nvSpPr>
-              <p:cNvPr id="103" name="space-nested-leaf"/>
+              <p:cNvPr id="104" name="space-nested-leaf"/>
               <p:cNvSpPr/>
               <p:nvPr/>
             </p:nvSpPr>

--- a/fixtures/sample-editor-space.pptx
+++ b/fixtures/sample-editor-space.pptx
@@ -247,6 +247,32 @@
             </p:txBody>
           </p:sp>
         </p:grpSp>
+        <p:sp>
+          <p:nvSpPr>
+            <p:cNvPr id="105" name="space-outer-sibling"/>
+            <p:cNvSpPr/>
+            <p:nvPr/>
+          </p:nvSpPr>
+          <p:spPr>
+            <a:xfrm rot="1800000">
+              <a:off x="1619250" y="333375"/>
+              <a:ext cx="476250" cy="523875"/>
+            </a:xfrm>
+            <a:prstGeom prst="rect">
+              <a:avLst/>
+            </a:prstGeom>
+            <a:solidFill>
+              <a:schemeClr val="accent2"/>
+            </a:solidFill>
+          </p:spPr>
+          <p:txBody>
+            <a:bodyPr anchor="ctr"/>
+            <a:lstStyle/>
+            <a:p>
+              <a:endParaRPr/>
+            </a:p>
+          </p:txBody>
+        </p:sp>
       </p:grpSp>
     </p:spTree>
   </p:cSld>
